--- a/dist/초6/국어/토론과글쓰기/초6_국어_토론과글쓰기_01_토론하기_학생용.pptx
+++ b/dist/초6/국어/토론과글쓰기/초6_국어_토론과글쓰기_01_토론하기_학생용.pptx
@@ -120,13 +120,13 @@
   <p:extLst>
     <p:ext uri="{521415D9-36F7-43E2-AB2F-B90AF26B5E84}">
       <p14:sectionLst xmlns:p14="http://schemas.microsoft.com/office/powerpoint/2010/main">
-        <p14:section name="도입" id="{17b09343-4810-75c8-29ef-39e077c70eef}">
+        <p14:section name="도입" id="{91f0027d-e182-0d0b-80e3-cb05179d9674}">
           <p14:sldIdLst>
             <p14:sldId id="256"/>
             <p14:sldId id="257"/>
           </p14:sldIdLst>
         </p14:section>
-        <p14:section name="개념" id="{49b7ebd5-02bf-f901-710d-9c5bdb186169}">
+        <p14:section name="개념" id="{df919f28-ab78-c19d-fc18-5d4678c2a37d}">
           <p14:sldIdLst>
             <p14:sldId id="258"/>
             <p14:sldId id="259"/>
@@ -135,25 +135,25 @@
             <p14:sldId id="262"/>
           </p14:sldIdLst>
         </p14:section>
-        <p14:section name="연습" id="{bcd151af-88b8-9832-1647-a33a9a5e0dad}">
+        <p14:section name="연습" id="{0ca2dab0-7794-2597-b18f-d7ab0587588e}">
           <p14:sldIdLst>
             <p14:sldId id="263"/>
             <p14:sldId id="264"/>
             <p14:sldId id="265"/>
           </p14:sldIdLst>
         </p14:section>
-        <p14:section name="확인" id="{8cef0b0d-f932-a12d-d0b4-1f434aeb53bc}">
+        <p14:section name="확인" id="{bdc2fd7c-a8c4-65b2-16b2-188c658cf0f0}">
           <p14:sldIdLst>
             <p14:sldId id="266"/>
             <p14:sldId id="267"/>
           </p14:sldIdLst>
         </p14:section>
-        <p14:section name="정리" id="{88cc60a1-4a15-11f0-d671-b2bb518c4ace}">
+        <p14:section name="정리" id="{d2e0e0de-7193-f7c0-33fc-6e7e15d0f62d}">
           <p14:sldIdLst>
             <p14:sldId id="268"/>
           </p14:sldIdLst>
         </p14:section>
-        <p14:section name="보충" id="{8f9d7374-d518-9d99-9fc7-e1519178cee1}">
+        <p14:section name="보충" id="{cec32e2d-c46b-08a1-fe8b-d26ab6dfb9a4}">
           <p14:sldIdLst>
             <p14:sldId id="269"/>
           </p14:sldIdLst>
